--- a/Documents/final _id_immobilier_presentation.pptx
+++ b/Documents/final _id_immobilier_presentation.pptx
@@ -1929,18 +1929,7 @@
                 <a:ea typeface="Arial" pitchFamily="34" charset="-122"/>
                 <a:cs typeface="Arial" pitchFamily="34" charset="-120"/>
               </a:rPr>
-              <a:t>Prof</a:t>
-            </a:r>
-            <a:r>
-              <a:rPr lang="en-US" sz="1000" i="1" dirty="0" smtClean="0">
-                <a:solidFill>
-                  <a:srgbClr val="8AAABB"/>
-                </a:solidFill>
-                <a:latin typeface="Arial" pitchFamily="34" charset="0"/>
-                <a:ea typeface="Arial" pitchFamily="34" charset="-122"/>
-                <a:cs typeface="Arial" pitchFamily="34" charset="-120"/>
-              </a:rPr>
-              <a:t>:  </a:t>
+              <a:t>Prof:  </a:t>
             </a:r>
             <a:r>
               <a:rPr lang="en-US" sz="1000" i="1" dirty="0">
@@ -12489,7 +12478,7 @@
               <a:buNone/>
             </a:pPr>
             <a:r>
-              <a:rPr lang="en-US" sz="3400" b="1" dirty="0">
+              <a:rPr lang="en-US" sz="3400" b="1">
                 <a:solidFill>
                   <a:srgbClr val="22C55E"/>
                 </a:solidFill>
@@ -12497,7 +12486,18 @@
                 <a:ea typeface="Arial Black" pitchFamily="34" charset="-122"/>
                 <a:cs typeface="Arial Black" pitchFamily="34" charset="-120"/>
               </a:rPr>
-              <a:t>5 262</a:t>
+              <a:t>5 </a:t>
+            </a:r>
+            <a:r>
+              <a:rPr lang="en-US" sz="3400" b="1" smtClean="0">
+                <a:solidFill>
+                  <a:srgbClr val="22C55E"/>
+                </a:solidFill>
+                <a:latin typeface="Arial Black" pitchFamily="34" charset="0"/>
+                <a:ea typeface="Arial Black" pitchFamily="34" charset="-122"/>
+                <a:cs typeface="Arial Black" pitchFamily="34" charset="-120"/>
+              </a:rPr>
+              <a:t>261</a:t>
             </a:r>
             <a:endParaRPr lang="en-US" sz="3400" dirty="0"/>
           </a:p>
